--- a/public/fun/pack/pptx/birthdaypro/돌잔치프리미엄_14_감사인사중심_네이비샴페인.pptx
+++ b/public/fun/pack/pptx/birthdaypro/돌잔치프리미엄_14_감사인사중심_네이비샴페인.pptx
@@ -112,12 +112,12 @@
   <p:extLst>
     <p:ext uri="{521415D9-36F7-43E2-AB2F-B90AF26B5E84}">
       <p14:sectionLst xmlns:p14="http://schemas.microsoft.com/office/powerpoint/2010/main">
-        <p14:section name="시작" id="{CCE43382-E77F-49F9-9529-AAB9DA2E101C}">
+        <p14:section name="시작" id="{D53C935E-2DEB-4B9E-B47E-E63F841DE4F5}">
           <p14:sldIdLst>
             <p14:sldId id="256"/>
           </p14:sldIdLst>
         </p14:section>
-        <p14:section name="본문" id="{512F4AC0-0A96-4104-B6FA-7FA6C381B24E}">
+        <p14:section name="본문" id="{42EB876E-E3F2-41BC-8C4B-9242799DA25D}">
           <p14:sldIdLst>
             <p14:sldId id="257"/>
             <p14:sldId id="258"/>
@@ -125,7 +125,7 @@
             <p14:sldId id="260"/>
           </p14:sldIdLst>
         </p14:section>
-        <p14:section name="마무리" id="{860D2E31-5263-4E2B-8BA3-057CB2FC34C1}">
+        <p14:section name="마무리" id="{A322AE60-97D5-44E6-AFAD-F0D4CF3F5AC6}">
           <p14:sldIdLst>
             <p14:sldId id="261"/>
           </p14:sldIdLst>
@@ -1589,7 +1589,7 @@
             </a:lvl1pPr>
           </a:lstStyle>
           <a:p>
-            <a:fld id="{55B04A8C-98D9-4F18-87B2-4C2CE5D8B2B2}" type="slidenum">
+            <a:fld id="{7ED0F619-AD8E-4795-BA76-0E9305CB647A}" type="slidenum">
               <a:rPr lang="en-US"/>
               <a:t>‹#›</a:t>
             </a:fld>
@@ -2463,7 +2463,7 @@
             </a:lvl1pPr>
           </a:lstStyle>
           <a:p>
-            <a:fld id="{690AFBB3-9100-490C-8798-8456F9F9BA2C}" type="slidenum">
+            <a:fld id="{121FFE70-150D-47F2-872C-756294DCBD1F}" type="slidenum">
               <a:rPr lang="en-US"/>
               <a:t>‹#›</a:t>
             </a:fld>
@@ -3216,7 +3216,7 @@
             </a:lvl1pPr>
           </a:lstStyle>
           <a:p>
-            <a:fld id="{20484C84-68A4-4312-8475-AB4B80B6CA9D}" type="slidenum">
+            <a:fld id="{A9AFBA8B-F290-49ED-B271-8E647DB5BDE3}" type="slidenum">
               <a:rPr lang="en-US"/>
               <a:t>‹#›</a:t>
             </a:fld>
@@ -4193,7 +4193,7 @@
           <a:p>
             <a:r>
               <a:rPr lang="ko-KR"/>
-              <a:t>아기 이름 · 0000. 00. 00</a:t>
+              <a:t>아기 이름 · 날짜 입력</a:t>
             </a:r>
           </a:p>
           <a:p>
@@ -4353,7 +4353,7 @@
           <a:bodyPr/>
           <a:lstStyle/>
           <a:p>
-            <a:fld id="{C665734B-480F-4337-B2EF-6BA847C37213}" type="slidenum">
+            <a:fld id="{F598068B-02DA-475B-9A78-D5237FDBFE9F}" type="slidenum">
               <a:rPr lang="en-US"/>
               <a:t>‹#›</a:t>
             </a:fld>
@@ -4953,7 +4953,7 @@
           <a:bodyPr/>
           <a:lstStyle/>
           <a:p>
-            <a:fld id="{873784B4-028B-4B96-BB1D-074A124ECC5D}" type="slidenum">
+            <a:fld id="{A453E5F2-062B-4D9D-9739-445032B3F5BD}" type="slidenum">
               <a:rPr lang="en-US"/>
               <a:t>‹#›</a:t>
             </a:fld>
@@ -5283,7 +5283,7 @@
           <a:bodyPr/>
           <a:lstStyle/>
           <a:p>
-            <a:fld id="{4A02D334-7100-41EE-88CA-ACE856123036}" type="slidenum">
+            <a:fld id="{8917ABC3-28F2-4299-8221-14C6BF0280E3}" type="slidenum">
               <a:rPr lang="en-US"/>
               <a:t>‹#›</a:t>
             </a:fld>
@@ -6133,7 +6133,7 @@
           <a:bodyPr/>
           <a:lstStyle/>
           <a:p>
-            <a:fld id="{8B539F64-FD30-466C-ABE7-0C415BB6D39F}" type="slidenum">
+            <a:fld id="{36D37567-64EB-4509-BE31-F9B20E0CC6F6}" type="slidenum">
               <a:rPr lang="en-US"/>
               <a:t>‹#›</a:t>
             </a:fld>
